--- a/docs/weekly-reports/Week 1/Team_21.pptx
+++ b/docs/weekly-reports/Week 1/Team_21.pptx
@@ -3440,11 +3440,29 @@
             </a:r>
             <a:r>
               <a:rPr sz="1800" dirty="0" err="1"/>
-              <a:t>Bodupally</a:t>
+              <a:t>Boddupally</a:t>
             </a:r>
             <a:r>
               <a:rPr sz="1800" dirty="0"/>
               <a:t> Narendar</a:t>
+            </a:r>
+          </a:p>
+          <a:p>
+            <a:r>
+              <a:rPr lang="en-US" sz="1800" dirty="0"/>
+              <a:t>				   2320090018 : M Praneeth Reddy</a:t>
+            </a:r>
+            <a:r>
+              <a:rPr sz="1800" dirty="0"/>
+              <a:t/>
+            </a:r>
+            <a:r>
+              <a:rPr sz="1800" dirty="0" err="1"/>
+              <a:t/>
+            </a:r>
+            <a:r>
+              <a:rPr sz="1800" dirty="0"/>
+              <a:t/>
             </a:r>
           </a:p>
         </p:txBody>
